--- a/thesis/presentations/BrainSafe_master.pptx
+++ b/thesis/presentations/BrainSafe_master.pptx
@@ -6685,8 +6685,8 @@
         </p:blipFill>
         <p:spPr>
           <a:xfrm>
-            <a:off x="566928" y="1648579"/>
-            <a:ext cx="5897880" cy="4493529"/>
+            <a:off x="566928" y="1592678"/>
+            <a:ext cx="5897880" cy="4605332"/>
           </a:xfrm>
           <a:prstGeom prst="rect">
             <a:avLst/>
@@ -7090,7 +7090,7 @@
                 </a:solidFill>
                 <a:latin typeface="Calibri"/>
               </a:rPr>
-              <a:t>Panel D. The 38 binder endpoints carry Platt scaling at a mean of 0.0762 and no conformal statement at all.</a:t>
+              <a:t>Panel D. None of the 47 deployed binder endpoints carries a conformal statement. The 38 with a measured calibration error average 0.0762; the other 9 carry none.</a:t>
             </a:r>
           </a:p>
         </p:txBody>
@@ -13262,8 +13262,8 @@
         </p:blipFill>
         <p:spPr>
           <a:xfrm>
-            <a:off x="566928" y="1463062"/>
-            <a:ext cx="5897880" cy="4864564"/>
+            <a:off x="566928" y="1497047"/>
+            <a:ext cx="5897880" cy="4796593"/>
           </a:xfrm>
           <a:prstGeom prst="rect">
             <a:avLst/>
@@ -15628,7 +15628,7 @@
                 </a:solidFill>
                 <a:latin typeface="Calibri"/>
               </a:rPr>
-              <a:t>The full stack reaches 8 core classifiers. The 38 binder endpoints carry Platt scaling at a calibration error of 0.0762, about five times the core figure, and no conformal statement at all.</a:t>
+              <a:t>The full stack reaches 8 core classifiers. None of the 47 deployed binder endpoints has a conformal statement; the 38 with a measured calibration error average 0.0762, about five times the core figure, and 9 carry no calibration measurement at all.</a:t>
             </a:r>
           </a:p>
         </p:txBody>
@@ -18494,8 +18494,8 @@
         </p:blipFill>
         <p:spPr>
           <a:xfrm>
-            <a:off x="859359" y="1444752"/>
-            <a:ext cx="5313017" cy="4901184"/>
+            <a:off x="897026" y="1444752"/>
+            <a:ext cx="5237683" cy="4901184"/>
           </a:xfrm>
           <a:prstGeom prst="rect">
             <a:avLst/>
